--- a/public/videos/repositories/event-trip-alert/event-trip-alert-tech-preview.pptx
+++ b/public/videos/repositories/event-trip-alert/event-trip-alert-tech-preview.pptx
@@ -134,7 +134,7 @@
           <p:cNvPr id="2" name="タイトル 1">
             <a:extLst>
               <a:ext uri="{FF2B5EF4-FFF2-40B4-BE49-F238E27FC236}">
-                <a16:creationId xmlns:a16="http://schemas.microsoft.com/office/drawing/2014/main" id="{40E636CC-33CD-0097-3D99-A27C1A87F57C}"/>
+                <a16:creationId xmlns:a16="http://schemas.microsoft.com/office/drawing/2014/main" id="{D2BA10F4-A322-B0F6-839D-9DE5AD2138B5}"/>
               </a:ext>
             </a:extLst>
           </p:cNvPr>
@@ -171,7 +171,7 @@
           <p:cNvPr id="3" name="字幕 2">
             <a:extLst>
               <a:ext uri="{FF2B5EF4-FFF2-40B4-BE49-F238E27FC236}">
-                <a16:creationId xmlns:a16="http://schemas.microsoft.com/office/drawing/2014/main" id="{5A6CFAC0-3E82-3824-38F2-30D3CB873B8B}"/>
+                <a16:creationId xmlns:a16="http://schemas.microsoft.com/office/drawing/2014/main" id="{BE608C0C-C095-1FB7-E211-C8BC23411290}"/>
               </a:ext>
             </a:extLst>
           </p:cNvPr>
@@ -241,7 +241,7 @@
           <p:cNvPr id="4" name="日付プレースホルダー 3">
             <a:extLst>
               <a:ext uri="{FF2B5EF4-FFF2-40B4-BE49-F238E27FC236}">
-                <a16:creationId xmlns:a16="http://schemas.microsoft.com/office/drawing/2014/main" id="{3ECEC069-6C35-6440-A07C-B03F6A295742}"/>
+                <a16:creationId xmlns:a16="http://schemas.microsoft.com/office/drawing/2014/main" id="{D3A5A01E-1DCB-C220-0F3C-E543F5FFFB37}"/>
               </a:ext>
             </a:extLst>
           </p:cNvPr>
@@ -257,7 +257,7 @@
           <a:bodyPr/>
           <a:lstStyle/>
           <a:p>
-            <a:fld id="{E360CE76-1914-459D-9C16-99AA7840CFA6}" type="datetimeFigureOut">
+            <a:fld id="{31B974E9-EACD-469D-99F2-D2971850AFD3}" type="datetimeFigureOut">
               <a:rPr kumimoji="1" lang="ja-JP" altLang="en-US" smtClean="0"/>
               <a:t>2026/7/30</a:t>
             </a:fld>
@@ -270,7 +270,7 @@
           <p:cNvPr id="5" name="フッター プレースホルダー 4">
             <a:extLst>
               <a:ext uri="{FF2B5EF4-FFF2-40B4-BE49-F238E27FC236}">
-                <a16:creationId xmlns:a16="http://schemas.microsoft.com/office/drawing/2014/main" id="{8C84B498-401F-D1C5-4D58-2B8538ED76F3}"/>
+                <a16:creationId xmlns:a16="http://schemas.microsoft.com/office/drawing/2014/main" id="{A912A822-B2F1-BF2A-2C72-5FEB740F8993}"/>
               </a:ext>
             </a:extLst>
           </p:cNvPr>
@@ -295,7 +295,7 @@
           <p:cNvPr id="6" name="スライド番号プレースホルダー 5">
             <a:extLst>
               <a:ext uri="{FF2B5EF4-FFF2-40B4-BE49-F238E27FC236}">
-                <a16:creationId xmlns:a16="http://schemas.microsoft.com/office/drawing/2014/main" id="{DD13FE5D-3D47-A38A-C462-6E08678A7284}"/>
+                <a16:creationId xmlns:a16="http://schemas.microsoft.com/office/drawing/2014/main" id="{2F127B74-40C8-19E4-9B78-56B1D398AD69}"/>
               </a:ext>
             </a:extLst>
           </p:cNvPr>
@@ -311,7 +311,7 @@
           <a:bodyPr/>
           <a:lstStyle/>
           <a:p>
-            <a:fld id="{2AE10F04-7F6D-4548-A0C9-EC7E7B19ACDA}" type="slidenum">
+            <a:fld id="{E97320B4-A53F-491A-8314-86FF3D167379}" type="slidenum">
               <a:rPr kumimoji="1" lang="ja-JP" altLang="en-US" smtClean="0"/>
               <a:t>‹#›</a:t>
             </a:fld>
@@ -322,7 +322,7 @@
     </p:spTree>
     <p:extLst>
       <p:ext uri="{BB962C8B-B14F-4D97-AF65-F5344CB8AC3E}">
-        <p14:creationId xmlns:p14="http://schemas.microsoft.com/office/powerpoint/2010/main" val="1662822131"/>
+        <p14:creationId xmlns:p14="http://schemas.microsoft.com/office/powerpoint/2010/main" val="3564246666"/>
       </p:ext>
     </p:extLst>
   </p:cSld>
@@ -354,7 +354,7 @@
           <p:cNvPr id="2" name="タイトル 1">
             <a:extLst>
               <a:ext uri="{FF2B5EF4-FFF2-40B4-BE49-F238E27FC236}">
-                <a16:creationId xmlns:a16="http://schemas.microsoft.com/office/drawing/2014/main" id="{041DE67D-2535-72FC-7E7B-70E56AA28EAE}"/>
+                <a16:creationId xmlns:a16="http://schemas.microsoft.com/office/drawing/2014/main" id="{8312C437-B62D-D753-4333-76C785EC2EAB}"/>
               </a:ext>
             </a:extLst>
           </p:cNvPr>
@@ -382,7 +382,7 @@
           <p:cNvPr id="3" name="縦書きテキスト プレースホルダー 2">
             <a:extLst>
               <a:ext uri="{FF2B5EF4-FFF2-40B4-BE49-F238E27FC236}">
-                <a16:creationId xmlns:a16="http://schemas.microsoft.com/office/drawing/2014/main" id="{CE1A14AE-DF0B-512A-11AB-F814C43ABEC3}"/>
+                <a16:creationId xmlns:a16="http://schemas.microsoft.com/office/drawing/2014/main" id="{6A6E82FA-D934-8301-773C-184A74A50826}"/>
               </a:ext>
             </a:extLst>
           </p:cNvPr>
@@ -471,7 +471,7 @@
           <p:cNvPr id="4" name="日付プレースホルダー 3">
             <a:extLst>
               <a:ext uri="{FF2B5EF4-FFF2-40B4-BE49-F238E27FC236}">
-                <a16:creationId xmlns:a16="http://schemas.microsoft.com/office/drawing/2014/main" id="{14BFCCF0-E4A2-B9AD-1F20-A92C7533D786}"/>
+                <a16:creationId xmlns:a16="http://schemas.microsoft.com/office/drawing/2014/main" id="{4FBF1B4C-8D2F-33BD-9AE4-1638B5DE06FF}"/>
               </a:ext>
             </a:extLst>
           </p:cNvPr>
@@ -487,7 +487,7 @@
           <a:bodyPr/>
           <a:lstStyle/>
           <a:p>
-            <a:fld id="{E360CE76-1914-459D-9C16-99AA7840CFA6}" type="datetimeFigureOut">
+            <a:fld id="{31B974E9-EACD-469D-99F2-D2971850AFD3}" type="datetimeFigureOut">
               <a:rPr kumimoji="1" lang="ja-JP" altLang="en-US" smtClean="0"/>
               <a:t>2026/7/30</a:t>
             </a:fld>
@@ -500,7 +500,7 @@
           <p:cNvPr id="5" name="フッター プレースホルダー 4">
             <a:extLst>
               <a:ext uri="{FF2B5EF4-FFF2-40B4-BE49-F238E27FC236}">
-                <a16:creationId xmlns:a16="http://schemas.microsoft.com/office/drawing/2014/main" id="{0BF70E3E-7674-4F2E-E757-599C9D34C5C8}"/>
+                <a16:creationId xmlns:a16="http://schemas.microsoft.com/office/drawing/2014/main" id="{8E32957E-6E73-44E8-5631-217CD149A1F6}"/>
               </a:ext>
             </a:extLst>
           </p:cNvPr>
@@ -525,7 +525,7 @@
           <p:cNvPr id="6" name="スライド番号プレースホルダー 5">
             <a:extLst>
               <a:ext uri="{FF2B5EF4-FFF2-40B4-BE49-F238E27FC236}">
-                <a16:creationId xmlns:a16="http://schemas.microsoft.com/office/drawing/2014/main" id="{BCD2F3B2-D9A4-CC66-4A0E-0F8865DB8711}"/>
+                <a16:creationId xmlns:a16="http://schemas.microsoft.com/office/drawing/2014/main" id="{E1329674-4E26-501E-DE65-6F74ABDD5DF6}"/>
               </a:ext>
             </a:extLst>
           </p:cNvPr>
@@ -541,7 +541,7 @@
           <a:bodyPr/>
           <a:lstStyle/>
           <a:p>
-            <a:fld id="{2AE10F04-7F6D-4548-A0C9-EC7E7B19ACDA}" type="slidenum">
+            <a:fld id="{E97320B4-A53F-491A-8314-86FF3D167379}" type="slidenum">
               <a:rPr kumimoji="1" lang="ja-JP" altLang="en-US" smtClean="0"/>
               <a:t>‹#›</a:t>
             </a:fld>
@@ -552,7 +552,7 @@
     </p:spTree>
     <p:extLst>
       <p:ext uri="{BB962C8B-B14F-4D97-AF65-F5344CB8AC3E}">
-        <p14:creationId xmlns:p14="http://schemas.microsoft.com/office/powerpoint/2010/main" val="1872346086"/>
+        <p14:creationId xmlns:p14="http://schemas.microsoft.com/office/powerpoint/2010/main" val="2879924020"/>
       </p:ext>
     </p:extLst>
   </p:cSld>
@@ -584,7 +584,7 @@
           <p:cNvPr id="2" name="縦書きタイトル 1">
             <a:extLst>
               <a:ext uri="{FF2B5EF4-FFF2-40B4-BE49-F238E27FC236}">
-                <a16:creationId xmlns:a16="http://schemas.microsoft.com/office/drawing/2014/main" id="{C48B6541-BACB-6940-F6A4-47FC879E5742}"/>
+                <a16:creationId xmlns:a16="http://schemas.microsoft.com/office/drawing/2014/main" id="{8C1561EE-DE11-7F59-8D65-17EA49B96593}"/>
               </a:ext>
             </a:extLst>
           </p:cNvPr>
@@ -617,7 +617,7 @@
           <p:cNvPr id="3" name="縦書きテキスト プレースホルダー 2">
             <a:extLst>
               <a:ext uri="{FF2B5EF4-FFF2-40B4-BE49-F238E27FC236}">
-                <a16:creationId xmlns:a16="http://schemas.microsoft.com/office/drawing/2014/main" id="{2796503F-50CD-EADE-187F-12A8DB2B1444}"/>
+                <a16:creationId xmlns:a16="http://schemas.microsoft.com/office/drawing/2014/main" id="{DD9B672F-ED0F-D920-10A6-B06ECCAE02C7}"/>
               </a:ext>
             </a:extLst>
           </p:cNvPr>
@@ -711,7 +711,7 @@
           <p:cNvPr id="4" name="日付プレースホルダー 3">
             <a:extLst>
               <a:ext uri="{FF2B5EF4-FFF2-40B4-BE49-F238E27FC236}">
-                <a16:creationId xmlns:a16="http://schemas.microsoft.com/office/drawing/2014/main" id="{76327F8B-B22E-C84A-7E5B-5C144C7C2D94}"/>
+                <a16:creationId xmlns:a16="http://schemas.microsoft.com/office/drawing/2014/main" id="{4AD10EE7-9789-AAB3-81C9-D1B4A82D0169}"/>
               </a:ext>
             </a:extLst>
           </p:cNvPr>
@@ -727,7 +727,7 @@
           <a:bodyPr/>
           <a:lstStyle/>
           <a:p>
-            <a:fld id="{E360CE76-1914-459D-9C16-99AA7840CFA6}" type="datetimeFigureOut">
+            <a:fld id="{31B974E9-EACD-469D-99F2-D2971850AFD3}" type="datetimeFigureOut">
               <a:rPr kumimoji="1" lang="ja-JP" altLang="en-US" smtClean="0"/>
               <a:t>2026/7/30</a:t>
             </a:fld>
@@ -740,7 +740,7 @@
           <p:cNvPr id="5" name="フッター プレースホルダー 4">
             <a:extLst>
               <a:ext uri="{FF2B5EF4-FFF2-40B4-BE49-F238E27FC236}">
-                <a16:creationId xmlns:a16="http://schemas.microsoft.com/office/drawing/2014/main" id="{874F594D-3233-294C-D90D-5D605A1A884E}"/>
+                <a16:creationId xmlns:a16="http://schemas.microsoft.com/office/drawing/2014/main" id="{E7325A9D-1033-44CE-5FD4-D79C71D02EBE}"/>
               </a:ext>
             </a:extLst>
           </p:cNvPr>
@@ -765,7 +765,7 @@
           <p:cNvPr id="6" name="スライド番号プレースホルダー 5">
             <a:extLst>
               <a:ext uri="{FF2B5EF4-FFF2-40B4-BE49-F238E27FC236}">
-                <a16:creationId xmlns:a16="http://schemas.microsoft.com/office/drawing/2014/main" id="{B208ED0D-727C-BE2C-A7AF-8006301DC0DA}"/>
+                <a16:creationId xmlns:a16="http://schemas.microsoft.com/office/drawing/2014/main" id="{0FEC9E4C-CBA9-AD13-8A1E-264F32297FDD}"/>
               </a:ext>
             </a:extLst>
           </p:cNvPr>
@@ -781,7 +781,7 @@
           <a:bodyPr/>
           <a:lstStyle/>
           <a:p>
-            <a:fld id="{2AE10F04-7F6D-4548-A0C9-EC7E7B19ACDA}" type="slidenum">
+            <a:fld id="{E97320B4-A53F-491A-8314-86FF3D167379}" type="slidenum">
               <a:rPr kumimoji="1" lang="ja-JP" altLang="en-US" smtClean="0"/>
               <a:t>‹#›</a:t>
             </a:fld>
@@ -792,7 +792,7 @@
     </p:spTree>
     <p:extLst>
       <p:ext uri="{BB962C8B-B14F-4D97-AF65-F5344CB8AC3E}">
-        <p14:creationId xmlns:p14="http://schemas.microsoft.com/office/powerpoint/2010/main" val="2199093095"/>
+        <p14:creationId xmlns:p14="http://schemas.microsoft.com/office/powerpoint/2010/main" val="1515113270"/>
       </p:ext>
     </p:extLst>
   </p:cSld>
@@ -824,7 +824,7 @@
           <p:cNvPr id="2" name="タイトル 1">
             <a:extLst>
               <a:ext uri="{FF2B5EF4-FFF2-40B4-BE49-F238E27FC236}">
-                <a16:creationId xmlns:a16="http://schemas.microsoft.com/office/drawing/2014/main" id="{CED8B48E-23CC-2891-B78E-FA404C4B553D}"/>
+                <a16:creationId xmlns:a16="http://schemas.microsoft.com/office/drawing/2014/main" id="{40910DF5-F134-A678-DCE7-F1299986142E}"/>
               </a:ext>
             </a:extLst>
           </p:cNvPr>
@@ -852,7 +852,7 @@
           <p:cNvPr id="3" name="コンテンツ プレースホルダー 2">
             <a:extLst>
               <a:ext uri="{FF2B5EF4-FFF2-40B4-BE49-F238E27FC236}">
-                <a16:creationId xmlns:a16="http://schemas.microsoft.com/office/drawing/2014/main" id="{CE3367DA-2BF0-6143-5396-C4DB3DA4926A}"/>
+                <a16:creationId xmlns:a16="http://schemas.microsoft.com/office/drawing/2014/main" id="{78E32C6F-B18B-7B3F-8B10-D70CE6EB138C}"/>
               </a:ext>
             </a:extLst>
           </p:cNvPr>
@@ -941,7 +941,7 @@
           <p:cNvPr id="4" name="日付プレースホルダー 3">
             <a:extLst>
               <a:ext uri="{FF2B5EF4-FFF2-40B4-BE49-F238E27FC236}">
-                <a16:creationId xmlns:a16="http://schemas.microsoft.com/office/drawing/2014/main" id="{A87F50D9-8FCB-C54F-E284-8F22DE6F6473}"/>
+                <a16:creationId xmlns:a16="http://schemas.microsoft.com/office/drawing/2014/main" id="{70B1BF3E-1289-0641-1D5A-4A7C7485C68C}"/>
               </a:ext>
             </a:extLst>
           </p:cNvPr>
@@ -957,7 +957,7 @@
           <a:bodyPr/>
           <a:lstStyle/>
           <a:p>
-            <a:fld id="{E360CE76-1914-459D-9C16-99AA7840CFA6}" type="datetimeFigureOut">
+            <a:fld id="{31B974E9-EACD-469D-99F2-D2971850AFD3}" type="datetimeFigureOut">
               <a:rPr kumimoji="1" lang="ja-JP" altLang="en-US" smtClean="0"/>
               <a:t>2026/7/30</a:t>
             </a:fld>
@@ -970,7 +970,7 @@
           <p:cNvPr id="5" name="フッター プレースホルダー 4">
             <a:extLst>
               <a:ext uri="{FF2B5EF4-FFF2-40B4-BE49-F238E27FC236}">
-                <a16:creationId xmlns:a16="http://schemas.microsoft.com/office/drawing/2014/main" id="{FF2515A7-E504-F434-7738-8C3DB76E04AD}"/>
+                <a16:creationId xmlns:a16="http://schemas.microsoft.com/office/drawing/2014/main" id="{BF3D3BB5-30EF-9B62-8766-67B60B40EBF9}"/>
               </a:ext>
             </a:extLst>
           </p:cNvPr>
@@ -995,7 +995,7 @@
           <p:cNvPr id="6" name="スライド番号プレースホルダー 5">
             <a:extLst>
               <a:ext uri="{FF2B5EF4-FFF2-40B4-BE49-F238E27FC236}">
-                <a16:creationId xmlns:a16="http://schemas.microsoft.com/office/drawing/2014/main" id="{F8E0662F-626E-5232-1709-E7A83F366AFA}"/>
+                <a16:creationId xmlns:a16="http://schemas.microsoft.com/office/drawing/2014/main" id="{6EBF5DFA-4072-CF1E-391E-4EE6695BC943}"/>
               </a:ext>
             </a:extLst>
           </p:cNvPr>
@@ -1011,7 +1011,7 @@
           <a:bodyPr/>
           <a:lstStyle/>
           <a:p>
-            <a:fld id="{2AE10F04-7F6D-4548-A0C9-EC7E7B19ACDA}" type="slidenum">
+            <a:fld id="{E97320B4-A53F-491A-8314-86FF3D167379}" type="slidenum">
               <a:rPr kumimoji="1" lang="ja-JP" altLang="en-US" smtClean="0"/>
               <a:t>‹#›</a:t>
             </a:fld>
@@ -1022,7 +1022,7 @@
     </p:spTree>
     <p:extLst>
       <p:ext uri="{BB962C8B-B14F-4D97-AF65-F5344CB8AC3E}">
-        <p14:creationId xmlns:p14="http://schemas.microsoft.com/office/powerpoint/2010/main" val="1689832933"/>
+        <p14:creationId xmlns:p14="http://schemas.microsoft.com/office/powerpoint/2010/main" val="1720340296"/>
       </p:ext>
     </p:extLst>
   </p:cSld>
@@ -1054,7 +1054,7 @@
           <p:cNvPr id="2" name="タイトル 1">
             <a:extLst>
               <a:ext uri="{FF2B5EF4-FFF2-40B4-BE49-F238E27FC236}">
-                <a16:creationId xmlns:a16="http://schemas.microsoft.com/office/drawing/2014/main" id="{05BFF4EB-2E54-7A68-DEFF-31318059C242}"/>
+                <a16:creationId xmlns:a16="http://schemas.microsoft.com/office/drawing/2014/main" id="{A071E2F9-C19C-1CBC-E7E6-0FAA9237BF68}"/>
               </a:ext>
             </a:extLst>
           </p:cNvPr>
@@ -1091,7 +1091,7 @@
           <p:cNvPr id="3" name="テキスト プレースホルダー 2">
             <a:extLst>
               <a:ext uri="{FF2B5EF4-FFF2-40B4-BE49-F238E27FC236}">
-                <a16:creationId xmlns:a16="http://schemas.microsoft.com/office/drawing/2014/main" id="{7499D39B-20AF-FC54-A58D-D1C8FF5580D4}"/>
+                <a16:creationId xmlns:a16="http://schemas.microsoft.com/office/drawing/2014/main" id="{CDCA6F4D-F29A-4FCE-24CD-F6338D035530}"/>
               </a:ext>
             </a:extLst>
           </p:cNvPr>
@@ -1216,7 +1216,7 @@
           <p:cNvPr id="4" name="日付プレースホルダー 3">
             <a:extLst>
               <a:ext uri="{FF2B5EF4-FFF2-40B4-BE49-F238E27FC236}">
-                <a16:creationId xmlns:a16="http://schemas.microsoft.com/office/drawing/2014/main" id="{53038DF6-E149-21EA-A142-19DEF1A5602A}"/>
+                <a16:creationId xmlns:a16="http://schemas.microsoft.com/office/drawing/2014/main" id="{2043A5FC-EC8B-663D-2F71-F7C807EB9D23}"/>
               </a:ext>
             </a:extLst>
           </p:cNvPr>
@@ -1232,7 +1232,7 @@
           <a:bodyPr/>
           <a:lstStyle/>
           <a:p>
-            <a:fld id="{E360CE76-1914-459D-9C16-99AA7840CFA6}" type="datetimeFigureOut">
+            <a:fld id="{31B974E9-EACD-469D-99F2-D2971850AFD3}" type="datetimeFigureOut">
               <a:rPr kumimoji="1" lang="ja-JP" altLang="en-US" smtClean="0"/>
               <a:t>2026/7/30</a:t>
             </a:fld>
@@ -1245,7 +1245,7 @@
           <p:cNvPr id="5" name="フッター プレースホルダー 4">
             <a:extLst>
               <a:ext uri="{FF2B5EF4-FFF2-40B4-BE49-F238E27FC236}">
-                <a16:creationId xmlns:a16="http://schemas.microsoft.com/office/drawing/2014/main" id="{5D60B978-5A91-8F33-2FF4-43837297E329}"/>
+                <a16:creationId xmlns:a16="http://schemas.microsoft.com/office/drawing/2014/main" id="{4D3EE593-5D3B-E316-BBB7-71B8054753AD}"/>
               </a:ext>
             </a:extLst>
           </p:cNvPr>
@@ -1270,7 +1270,7 @@
           <p:cNvPr id="6" name="スライド番号プレースホルダー 5">
             <a:extLst>
               <a:ext uri="{FF2B5EF4-FFF2-40B4-BE49-F238E27FC236}">
-                <a16:creationId xmlns:a16="http://schemas.microsoft.com/office/drawing/2014/main" id="{300D8A98-0FD4-B290-1BBD-7A88275025BB}"/>
+                <a16:creationId xmlns:a16="http://schemas.microsoft.com/office/drawing/2014/main" id="{CE9F9EC3-61A1-0BF8-7946-3D3BFFAFFFEC}"/>
               </a:ext>
             </a:extLst>
           </p:cNvPr>
@@ -1286,7 +1286,7 @@
           <a:bodyPr/>
           <a:lstStyle/>
           <a:p>
-            <a:fld id="{2AE10F04-7F6D-4548-A0C9-EC7E7B19ACDA}" type="slidenum">
+            <a:fld id="{E97320B4-A53F-491A-8314-86FF3D167379}" type="slidenum">
               <a:rPr kumimoji="1" lang="ja-JP" altLang="en-US" smtClean="0"/>
               <a:t>‹#›</a:t>
             </a:fld>
@@ -1297,7 +1297,7 @@
     </p:spTree>
     <p:extLst>
       <p:ext uri="{BB962C8B-B14F-4D97-AF65-F5344CB8AC3E}">
-        <p14:creationId xmlns:p14="http://schemas.microsoft.com/office/powerpoint/2010/main" val="3465888956"/>
+        <p14:creationId xmlns:p14="http://schemas.microsoft.com/office/powerpoint/2010/main" val="1125678065"/>
       </p:ext>
     </p:extLst>
   </p:cSld>
@@ -1329,7 +1329,7 @@
           <p:cNvPr id="2" name="タイトル 1">
             <a:extLst>
               <a:ext uri="{FF2B5EF4-FFF2-40B4-BE49-F238E27FC236}">
-                <a16:creationId xmlns:a16="http://schemas.microsoft.com/office/drawing/2014/main" id="{2800138B-A136-9F5E-BEAA-38739F3848E8}"/>
+                <a16:creationId xmlns:a16="http://schemas.microsoft.com/office/drawing/2014/main" id="{7C94B6E8-F368-23D7-2696-4DFB14A1E6E3}"/>
               </a:ext>
             </a:extLst>
           </p:cNvPr>
@@ -1357,7 +1357,7 @@
           <p:cNvPr id="3" name="コンテンツ プレースホルダー 2">
             <a:extLst>
               <a:ext uri="{FF2B5EF4-FFF2-40B4-BE49-F238E27FC236}">
-                <a16:creationId xmlns:a16="http://schemas.microsoft.com/office/drawing/2014/main" id="{C134EF83-4298-3C0D-F6A9-0096A8989D76}"/>
+                <a16:creationId xmlns:a16="http://schemas.microsoft.com/office/drawing/2014/main" id="{FFF9D608-3921-129E-0259-D293E2735181}"/>
               </a:ext>
             </a:extLst>
           </p:cNvPr>
@@ -1451,7 +1451,7 @@
           <p:cNvPr id="4" name="コンテンツ プレースホルダー 3">
             <a:extLst>
               <a:ext uri="{FF2B5EF4-FFF2-40B4-BE49-F238E27FC236}">
-                <a16:creationId xmlns:a16="http://schemas.microsoft.com/office/drawing/2014/main" id="{A8A9313C-338A-4C7B-4E2C-45A21A9592B9}"/>
+                <a16:creationId xmlns:a16="http://schemas.microsoft.com/office/drawing/2014/main" id="{4DAB1D21-6747-49EB-ACFE-747D1A395B15}"/>
               </a:ext>
             </a:extLst>
           </p:cNvPr>
@@ -1545,7 +1545,7 @@
           <p:cNvPr id="5" name="日付プレースホルダー 4">
             <a:extLst>
               <a:ext uri="{FF2B5EF4-FFF2-40B4-BE49-F238E27FC236}">
-                <a16:creationId xmlns:a16="http://schemas.microsoft.com/office/drawing/2014/main" id="{FAAA100F-9BB1-D4B2-7BE4-6ED3DF02AC40}"/>
+                <a16:creationId xmlns:a16="http://schemas.microsoft.com/office/drawing/2014/main" id="{517F807D-6AF5-0918-FE14-9C2A79014C6B}"/>
               </a:ext>
             </a:extLst>
           </p:cNvPr>
@@ -1561,7 +1561,7 @@
           <a:bodyPr/>
           <a:lstStyle/>
           <a:p>
-            <a:fld id="{E360CE76-1914-459D-9C16-99AA7840CFA6}" type="datetimeFigureOut">
+            <a:fld id="{31B974E9-EACD-469D-99F2-D2971850AFD3}" type="datetimeFigureOut">
               <a:rPr kumimoji="1" lang="ja-JP" altLang="en-US" smtClean="0"/>
               <a:t>2026/7/30</a:t>
             </a:fld>
@@ -1574,7 +1574,7 @@
           <p:cNvPr id="6" name="フッター プレースホルダー 5">
             <a:extLst>
               <a:ext uri="{FF2B5EF4-FFF2-40B4-BE49-F238E27FC236}">
-                <a16:creationId xmlns:a16="http://schemas.microsoft.com/office/drawing/2014/main" id="{20FFCA72-C1EC-FAC6-AC7B-A92E41A2E3E9}"/>
+                <a16:creationId xmlns:a16="http://schemas.microsoft.com/office/drawing/2014/main" id="{9F4262C1-B468-1393-0CF1-52C3A08E1C8A}"/>
               </a:ext>
             </a:extLst>
           </p:cNvPr>
@@ -1599,7 +1599,7 @@
           <p:cNvPr id="7" name="スライド番号プレースホルダー 6">
             <a:extLst>
               <a:ext uri="{FF2B5EF4-FFF2-40B4-BE49-F238E27FC236}">
-                <a16:creationId xmlns:a16="http://schemas.microsoft.com/office/drawing/2014/main" id="{D1B79555-DEBE-D1F6-D853-C682DC90EF12}"/>
+                <a16:creationId xmlns:a16="http://schemas.microsoft.com/office/drawing/2014/main" id="{814DE919-0C28-DEC4-3D11-4C5115A5A54E}"/>
               </a:ext>
             </a:extLst>
           </p:cNvPr>
@@ -1615,7 +1615,7 @@
           <a:bodyPr/>
           <a:lstStyle/>
           <a:p>
-            <a:fld id="{2AE10F04-7F6D-4548-A0C9-EC7E7B19ACDA}" type="slidenum">
+            <a:fld id="{E97320B4-A53F-491A-8314-86FF3D167379}" type="slidenum">
               <a:rPr kumimoji="1" lang="ja-JP" altLang="en-US" smtClean="0"/>
               <a:t>‹#›</a:t>
             </a:fld>
@@ -1626,7 +1626,7 @@
     </p:spTree>
     <p:extLst>
       <p:ext uri="{BB962C8B-B14F-4D97-AF65-F5344CB8AC3E}">
-        <p14:creationId xmlns:p14="http://schemas.microsoft.com/office/powerpoint/2010/main" val="2385187216"/>
+        <p14:creationId xmlns:p14="http://schemas.microsoft.com/office/powerpoint/2010/main" val="1012909731"/>
       </p:ext>
     </p:extLst>
   </p:cSld>
@@ -1658,7 +1658,7 @@
           <p:cNvPr id="2" name="タイトル 1">
             <a:extLst>
               <a:ext uri="{FF2B5EF4-FFF2-40B4-BE49-F238E27FC236}">
-                <a16:creationId xmlns:a16="http://schemas.microsoft.com/office/drawing/2014/main" id="{C6B48C3C-4F8B-B6B2-2005-34DCC42F9181}"/>
+                <a16:creationId xmlns:a16="http://schemas.microsoft.com/office/drawing/2014/main" id="{A6DB893B-9B3E-2161-3506-ED884753C52E}"/>
               </a:ext>
             </a:extLst>
           </p:cNvPr>
@@ -1691,7 +1691,7 @@
           <p:cNvPr id="3" name="テキスト プレースホルダー 2">
             <a:extLst>
               <a:ext uri="{FF2B5EF4-FFF2-40B4-BE49-F238E27FC236}">
-                <a16:creationId xmlns:a16="http://schemas.microsoft.com/office/drawing/2014/main" id="{DC49E73E-549B-AE5B-A401-22028B2412BE}"/>
+                <a16:creationId xmlns:a16="http://schemas.microsoft.com/office/drawing/2014/main" id="{8AF8AF05-215B-A218-FFE0-1152F3A8A8CE}"/>
               </a:ext>
             </a:extLst>
           </p:cNvPr>
@@ -1762,7 +1762,7 @@
           <p:cNvPr id="4" name="コンテンツ プレースホルダー 3">
             <a:extLst>
               <a:ext uri="{FF2B5EF4-FFF2-40B4-BE49-F238E27FC236}">
-                <a16:creationId xmlns:a16="http://schemas.microsoft.com/office/drawing/2014/main" id="{C460C75E-BB21-2D25-BE9E-342D36EAF6F1}"/>
+                <a16:creationId xmlns:a16="http://schemas.microsoft.com/office/drawing/2014/main" id="{E903FB1A-747E-7EAD-83E3-2D098C6716F5}"/>
               </a:ext>
             </a:extLst>
           </p:cNvPr>
@@ -1856,7 +1856,7 @@
           <p:cNvPr id="5" name="テキスト プレースホルダー 4">
             <a:extLst>
               <a:ext uri="{FF2B5EF4-FFF2-40B4-BE49-F238E27FC236}">
-                <a16:creationId xmlns:a16="http://schemas.microsoft.com/office/drawing/2014/main" id="{57FF47D1-A6A7-E5EF-ECEC-7FAC77A429B8}"/>
+                <a16:creationId xmlns:a16="http://schemas.microsoft.com/office/drawing/2014/main" id="{3D59BE4B-4DAD-CA55-A949-32024FD1B600}"/>
               </a:ext>
             </a:extLst>
           </p:cNvPr>
@@ -1927,7 +1927,7 @@
           <p:cNvPr id="6" name="コンテンツ プレースホルダー 5">
             <a:extLst>
               <a:ext uri="{FF2B5EF4-FFF2-40B4-BE49-F238E27FC236}">
-                <a16:creationId xmlns:a16="http://schemas.microsoft.com/office/drawing/2014/main" id="{A875AA58-23BB-6FD4-6F2C-D024A1EBDB3E}"/>
+                <a16:creationId xmlns:a16="http://schemas.microsoft.com/office/drawing/2014/main" id="{4EACA2EA-9950-2825-7B1F-841118A997C4}"/>
               </a:ext>
             </a:extLst>
           </p:cNvPr>
@@ -2021,7 +2021,7 @@
           <p:cNvPr id="7" name="日付プレースホルダー 6">
             <a:extLst>
               <a:ext uri="{FF2B5EF4-FFF2-40B4-BE49-F238E27FC236}">
-                <a16:creationId xmlns:a16="http://schemas.microsoft.com/office/drawing/2014/main" id="{1B913F8A-FEDD-68BF-F2DF-EF6D1B7BD6D8}"/>
+                <a16:creationId xmlns:a16="http://schemas.microsoft.com/office/drawing/2014/main" id="{3E82A551-2887-2399-42B0-7F2E66C9F268}"/>
               </a:ext>
             </a:extLst>
           </p:cNvPr>
@@ -2037,7 +2037,7 @@
           <a:bodyPr/>
           <a:lstStyle/>
           <a:p>
-            <a:fld id="{E360CE76-1914-459D-9C16-99AA7840CFA6}" type="datetimeFigureOut">
+            <a:fld id="{31B974E9-EACD-469D-99F2-D2971850AFD3}" type="datetimeFigureOut">
               <a:rPr kumimoji="1" lang="ja-JP" altLang="en-US" smtClean="0"/>
               <a:t>2026/7/30</a:t>
             </a:fld>
@@ -2050,7 +2050,7 @@
           <p:cNvPr id="8" name="フッター プレースホルダー 7">
             <a:extLst>
               <a:ext uri="{FF2B5EF4-FFF2-40B4-BE49-F238E27FC236}">
-                <a16:creationId xmlns:a16="http://schemas.microsoft.com/office/drawing/2014/main" id="{C4C28FB9-CCCB-10C6-864A-57F2F80C3FB6}"/>
+                <a16:creationId xmlns:a16="http://schemas.microsoft.com/office/drawing/2014/main" id="{EC1EF879-8327-9B82-78B6-974C29557ACB}"/>
               </a:ext>
             </a:extLst>
           </p:cNvPr>
@@ -2075,7 +2075,7 @@
           <p:cNvPr id="9" name="スライド番号プレースホルダー 8">
             <a:extLst>
               <a:ext uri="{FF2B5EF4-FFF2-40B4-BE49-F238E27FC236}">
-                <a16:creationId xmlns:a16="http://schemas.microsoft.com/office/drawing/2014/main" id="{3E2F0668-71B9-78FD-DB87-53C7C2891DF3}"/>
+                <a16:creationId xmlns:a16="http://schemas.microsoft.com/office/drawing/2014/main" id="{686CBA64-0003-5D0E-6797-D0F0B02E3038}"/>
               </a:ext>
             </a:extLst>
           </p:cNvPr>
@@ -2091,7 +2091,7 @@
           <a:bodyPr/>
           <a:lstStyle/>
           <a:p>
-            <a:fld id="{2AE10F04-7F6D-4548-A0C9-EC7E7B19ACDA}" type="slidenum">
+            <a:fld id="{E97320B4-A53F-491A-8314-86FF3D167379}" type="slidenum">
               <a:rPr kumimoji="1" lang="ja-JP" altLang="en-US" smtClean="0"/>
               <a:t>‹#›</a:t>
             </a:fld>
@@ -2102,7 +2102,7 @@
     </p:spTree>
     <p:extLst>
       <p:ext uri="{BB962C8B-B14F-4D97-AF65-F5344CB8AC3E}">
-        <p14:creationId xmlns:p14="http://schemas.microsoft.com/office/powerpoint/2010/main" val="3084505282"/>
+        <p14:creationId xmlns:p14="http://schemas.microsoft.com/office/powerpoint/2010/main" val="793347323"/>
       </p:ext>
     </p:extLst>
   </p:cSld>
@@ -2134,7 +2134,7 @@
           <p:cNvPr id="2" name="タイトル 1">
             <a:extLst>
               <a:ext uri="{FF2B5EF4-FFF2-40B4-BE49-F238E27FC236}">
-                <a16:creationId xmlns:a16="http://schemas.microsoft.com/office/drawing/2014/main" id="{317B21C5-4306-0AE2-0996-533C791A03B7}"/>
+                <a16:creationId xmlns:a16="http://schemas.microsoft.com/office/drawing/2014/main" id="{23B1B26B-9C8A-4971-D7BC-1CC2B60C5661}"/>
               </a:ext>
             </a:extLst>
           </p:cNvPr>
@@ -2162,7 +2162,7 @@
           <p:cNvPr id="3" name="日付プレースホルダー 2">
             <a:extLst>
               <a:ext uri="{FF2B5EF4-FFF2-40B4-BE49-F238E27FC236}">
-                <a16:creationId xmlns:a16="http://schemas.microsoft.com/office/drawing/2014/main" id="{DA40F715-B3A1-245D-0DF6-099E552E9F4D}"/>
+                <a16:creationId xmlns:a16="http://schemas.microsoft.com/office/drawing/2014/main" id="{9C989B38-CDB9-64B9-EF4E-C4FEBF8EA48C}"/>
               </a:ext>
             </a:extLst>
           </p:cNvPr>
@@ -2178,7 +2178,7 @@
           <a:bodyPr/>
           <a:lstStyle/>
           <a:p>
-            <a:fld id="{E360CE76-1914-459D-9C16-99AA7840CFA6}" type="datetimeFigureOut">
+            <a:fld id="{31B974E9-EACD-469D-99F2-D2971850AFD3}" type="datetimeFigureOut">
               <a:rPr kumimoji="1" lang="ja-JP" altLang="en-US" smtClean="0"/>
               <a:t>2026/7/30</a:t>
             </a:fld>
@@ -2191,7 +2191,7 @@
           <p:cNvPr id="4" name="フッター プレースホルダー 3">
             <a:extLst>
               <a:ext uri="{FF2B5EF4-FFF2-40B4-BE49-F238E27FC236}">
-                <a16:creationId xmlns:a16="http://schemas.microsoft.com/office/drawing/2014/main" id="{014F7044-B77B-049F-54FD-EA1866269D2B}"/>
+                <a16:creationId xmlns:a16="http://schemas.microsoft.com/office/drawing/2014/main" id="{5A696EA9-A81D-6524-18D2-3206A769064B}"/>
               </a:ext>
             </a:extLst>
           </p:cNvPr>
@@ -2216,7 +2216,7 @@
           <p:cNvPr id="5" name="スライド番号プレースホルダー 4">
             <a:extLst>
               <a:ext uri="{FF2B5EF4-FFF2-40B4-BE49-F238E27FC236}">
-                <a16:creationId xmlns:a16="http://schemas.microsoft.com/office/drawing/2014/main" id="{C9A7E343-3F24-4E3A-B256-5C49070F28C7}"/>
+                <a16:creationId xmlns:a16="http://schemas.microsoft.com/office/drawing/2014/main" id="{911CBE5E-6A87-A508-7BC3-EEA811672A65}"/>
               </a:ext>
             </a:extLst>
           </p:cNvPr>
@@ -2232,7 +2232,7 @@
           <a:bodyPr/>
           <a:lstStyle/>
           <a:p>
-            <a:fld id="{2AE10F04-7F6D-4548-A0C9-EC7E7B19ACDA}" type="slidenum">
+            <a:fld id="{E97320B4-A53F-491A-8314-86FF3D167379}" type="slidenum">
               <a:rPr kumimoji="1" lang="ja-JP" altLang="en-US" smtClean="0"/>
               <a:t>‹#›</a:t>
             </a:fld>
@@ -2243,7 +2243,7 @@
     </p:spTree>
     <p:extLst>
       <p:ext uri="{BB962C8B-B14F-4D97-AF65-F5344CB8AC3E}">
-        <p14:creationId xmlns:p14="http://schemas.microsoft.com/office/powerpoint/2010/main" val="168507188"/>
+        <p14:creationId xmlns:p14="http://schemas.microsoft.com/office/powerpoint/2010/main" val="1809646832"/>
       </p:ext>
     </p:extLst>
   </p:cSld>
@@ -2275,7 +2275,7 @@
           <p:cNvPr id="2" name="日付プレースホルダー 1">
             <a:extLst>
               <a:ext uri="{FF2B5EF4-FFF2-40B4-BE49-F238E27FC236}">
-                <a16:creationId xmlns:a16="http://schemas.microsoft.com/office/drawing/2014/main" id="{2A070ACB-EBAA-417B-7AC1-78C97F289BEE}"/>
+                <a16:creationId xmlns:a16="http://schemas.microsoft.com/office/drawing/2014/main" id="{275B4D0B-42D6-6251-75C5-A24E132E33D5}"/>
               </a:ext>
             </a:extLst>
           </p:cNvPr>
@@ -2291,7 +2291,7 @@
           <a:bodyPr/>
           <a:lstStyle/>
           <a:p>
-            <a:fld id="{E360CE76-1914-459D-9C16-99AA7840CFA6}" type="datetimeFigureOut">
+            <a:fld id="{31B974E9-EACD-469D-99F2-D2971850AFD3}" type="datetimeFigureOut">
               <a:rPr kumimoji="1" lang="ja-JP" altLang="en-US" smtClean="0"/>
               <a:t>2026/7/30</a:t>
             </a:fld>
@@ -2304,7 +2304,7 @@
           <p:cNvPr id="3" name="フッター プレースホルダー 2">
             <a:extLst>
               <a:ext uri="{FF2B5EF4-FFF2-40B4-BE49-F238E27FC236}">
-                <a16:creationId xmlns:a16="http://schemas.microsoft.com/office/drawing/2014/main" id="{F1A12555-B099-47E1-4EC5-F4F6E85A168B}"/>
+                <a16:creationId xmlns:a16="http://schemas.microsoft.com/office/drawing/2014/main" id="{414A0B2F-D3CB-9009-FC6F-608F3550BCAC}"/>
               </a:ext>
             </a:extLst>
           </p:cNvPr>
@@ -2329,7 +2329,7 @@
           <p:cNvPr id="4" name="スライド番号プレースホルダー 3">
             <a:extLst>
               <a:ext uri="{FF2B5EF4-FFF2-40B4-BE49-F238E27FC236}">
-                <a16:creationId xmlns:a16="http://schemas.microsoft.com/office/drawing/2014/main" id="{E2AB8F32-8CD2-87DE-DCF7-64AD47D72656}"/>
+                <a16:creationId xmlns:a16="http://schemas.microsoft.com/office/drawing/2014/main" id="{960B7DF3-73C2-FAF0-763E-4CF4A51BC9F0}"/>
               </a:ext>
             </a:extLst>
           </p:cNvPr>
@@ -2345,7 +2345,7 @@
           <a:bodyPr/>
           <a:lstStyle/>
           <a:p>
-            <a:fld id="{2AE10F04-7F6D-4548-A0C9-EC7E7B19ACDA}" type="slidenum">
+            <a:fld id="{E97320B4-A53F-491A-8314-86FF3D167379}" type="slidenum">
               <a:rPr kumimoji="1" lang="ja-JP" altLang="en-US" smtClean="0"/>
               <a:t>‹#›</a:t>
             </a:fld>
@@ -2356,7 +2356,7 @@
     </p:spTree>
     <p:extLst>
       <p:ext uri="{BB962C8B-B14F-4D97-AF65-F5344CB8AC3E}">
-        <p14:creationId xmlns:p14="http://schemas.microsoft.com/office/powerpoint/2010/main" val="1011464770"/>
+        <p14:creationId xmlns:p14="http://schemas.microsoft.com/office/powerpoint/2010/main" val="1459861783"/>
       </p:ext>
     </p:extLst>
   </p:cSld>
@@ -2388,7 +2388,7 @@
           <p:cNvPr id="2" name="タイトル 1">
             <a:extLst>
               <a:ext uri="{FF2B5EF4-FFF2-40B4-BE49-F238E27FC236}">
-                <a16:creationId xmlns:a16="http://schemas.microsoft.com/office/drawing/2014/main" id="{CD9FA45B-D6BA-C8A1-6411-898C5BFF2F58}"/>
+                <a16:creationId xmlns:a16="http://schemas.microsoft.com/office/drawing/2014/main" id="{059E9637-216C-EFD6-667C-7750271ADB9E}"/>
               </a:ext>
             </a:extLst>
           </p:cNvPr>
@@ -2425,7 +2425,7 @@
           <p:cNvPr id="3" name="コンテンツ プレースホルダー 2">
             <a:extLst>
               <a:ext uri="{FF2B5EF4-FFF2-40B4-BE49-F238E27FC236}">
-                <a16:creationId xmlns:a16="http://schemas.microsoft.com/office/drawing/2014/main" id="{A4658D8C-4097-6045-273C-D7AE2C7A078F}"/>
+                <a16:creationId xmlns:a16="http://schemas.microsoft.com/office/drawing/2014/main" id="{D3FF01E4-7B30-F1B4-0444-A4725D6751C3}"/>
               </a:ext>
             </a:extLst>
           </p:cNvPr>
@@ -2547,7 +2547,7 @@
           <p:cNvPr id="4" name="テキスト プレースホルダー 3">
             <a:extLst>
               <a:ext uri="{FF2B5EF4-FFF2-40B4-BE49-F238E27FC236}">
-                <a16:creationId xmlns:a16="http://schemas.microsoft.com/office/drawing/2014/main" id="{39519F0E-A225-A114-5729-034F4707A085}"/>
+                <a16:creationId xmlns:a16="http://schemas.microsoft.com/office/drawing/2014/main" id="{5D09EDD5-D273-8804-EE66-39F4D059C94F}"/>
               </a:ext>
             </a:extLst>
           </p:cNvPr>
@@ -2618,7 +2618,7 @@
           <p:cNvPr id="5" name="日付プレースホルダー 4">
             <a:extLst>
               <a:ext uri="{FF2B5EF4-FFF2-40B4-BE49-F238E27FC236}">
-                <a16:creationId xmlns:a16="http://schemas.microsoft.com/office/drawing/2014/main" id="{7BB9C834-490E-E278-71C0-4C1A83902981}"/>
+                <a16:creationId xmlns:a16="http://schemas.microsoft.com/office/drawing/2014/main" id="{928D1CC3-DEC6-7321-5525-3675B23C82C9}"/>
               </a:ext>
             </a:extLst>
           </p:cNvPr>
@@ -2634,7 +2634,7 @@
           <a:bodyPr/>
           <a:lstStyle/>
           <a:p>
-            <a:fld id="{E360CE76-1914-459D-9C16-99AA7840CFA6}" type="datetimeFigureOut">
+            <a:fld id="{31B974E9-EACD-469D-99F2-D2971850AFD3}" type="datetimeFigureOut">
               <a:rPr kumimoji="1" lang="ja-JP" altLang="en-US" smtClean="0"/>
               <a:t>2026/7/30</a:t>
             </a:fld>
@@ -2647,7 +2647,7 @@
           <p:cNvPr id="6" name="フッター プレースホルダー 5">
             <a:extLst>
               <a:ext uri="{FF2B5EF4-FFF2-40B4-BE49-F238E27FC236}">
-                <a16:creationId xmlns:a16="http://schemas.microsoft.com/office/drawing/2014/main" id="{D6447EA2-25FB-B4A8-DDF6-6569B0782317}"/>
+                <a16:creationId xmlns:a16="http://schemas.microsoft.com/office/drawing/2014/main" id="{E57AB9B3-AFE2-3666-AFAE-05A6AE728F3E}"/>
               </a:ext>
             </a:extLst>
           </p:cNvPr>
@@ -2672,7 +2672,7 @@
           <p:cNvPr id="7" name="スライド番号プレースホルダー 6">
             <a:extLst>
               <a:ext uri="{FF2B5EF4-FFF2-40B4-BE49-F238E27FC236}">
-                <a16:creationId xmlns:a16="http://schemas.microsoft.com/office/drawing/2014/main" id="{325189B2-E4FF-E5EE-D885-E5B6BBD3A049}"/>
+                <a16:creationId xmlns:a16="http://schemas.microsoft.com/office/drawing/2014/main" id="{D2D7528A-75A5-C256-48FD-88EE7850C232}"/>
               </a:ext>
             </a:extLst>
           </p:cNvPr>
@@ -2688,7 +2688,7 @@
           <a:bodyPr/>
           <a:lstStyle/>
           <a:p>
-            <a:fld id="{2AE10F04-7F6D-4548-A0C9-EC7E7B19ACDA}" type="slidenum">
+            <a:fld id="{E97320B4-A53F-491A-8314-86FF3D167379}" type="slidenum">
               <a:rPr kumimoji="1" lang="ja-JP" altLang="en-US" smtClean="0"/>
               <a:t>‹#›</a:t>
             </a:fld>
@@ -2699,7 +2699,7 @@
     </p:spTree>
     <p:extLst>
       <p:ext uri="{BB962C8B-B14F-4D97-AF65-F5344CB8AC3E}">
-        <p14:creationId xmlns:p14="http://schemas.microsoft.com/office/powerpoint/2010/main" val="1989677440"/>
+        <p14:creationId xmlns:p14="http://schemas.microsoft.com/office/powerpoint/2010/main" val="4243495858"/>
       </p:ext>
     </p:extLst>
   </p:cSld>
@@ -2731,7 +2731,7 @@
           <p:cNvPr id="2" name="タイトル 1">
             <a:extLst>
               <a:ext uri="{FF2B5EF4-FFF2-40B4-BE49-F238E27FC236}">
-                <a16:creationId xmlns:a16="http://schemas.microsoft.com/office/drawing/2014/main" id="{BD91B66A-7E96-CF29-8139-F1F0D9C89EC8}"/>
+                <a16:creationId xmlns:a16="http://schemas.microsoft.com/office/drawing/2014/main" id="{3E0C6958-0446-9CAA-2343-0A33D3267BCC}"/>
               </a:ext>
             </a:extLst>
           </p:cNvPr>
@@ -2768,7 +2768,7 @@
           <p:cNvPr id="3" name="図プレースホルダー 2">
             <a:extLst>
               <a:ext uri="{FF2B5EF4-FFF2-40B4-BE49-F238E27FC236}">
-                <a16:creationId xmlns:a16="http://schemas.microsoft.com/office/drawing/2014/main" id="{CBAB58F5-0D06-44CF-011C-E1320887017D}"/>
+                <a16:creationId xmlns:a16="http://schemas.microsoft.com/office/drawing/2014/main" id="{F4814BAD-6C22-D1DB-5AAA-1331FD79A6E9}"/>
               </a:ext>
             </a:extLst>
           </p:cNvPr>
@@ -2835,7 +2835,7 @@
           <p:cNvPr id="4" name="テキスト プレースホルダー 3">
             <a:extLst>
               <a:ext uri="{FF2B5EF4-FFF2-40B4-BE49-F238E27FC236}">
-                <a16:creationId xmlns:a16="http://schemas.microsoft.com/office/drawing/2014/main" id="{236ED0F9-029A-161A-B990-CECD8AC37A5E}"/>
+                <a16:creationId xmlns:a16="http://schemas.microsoft.com/office/drawing/2014/main" id="{5DB7DBD5-32F6-6CD7-0ED6-334C9D7366D2}"/>
               </a:ext>
             </a:extLst>
           </p:cNvPr>
@@ -2906,7 +2906,7 @@
           <p:cNvPr id="5" name="日付プレースホルダー 4">
             <a:extLst>
               <a:ext uri="{FF2B5EF4-FFF2-40B4-BE49-F238E27FC236}">
-                <a16:creationId xmlns:a16="http://schemas.microsoft.com/office/drawing/2014/main" id="{8FE033B6-EFC3-B2D1-12D2-C517A8E0F30F}"/>
+                <a16:creationId xmlns:a16="http://schemas.microsoft.com/office/drawing/2014/main" id="{D37B7031-A498-FBB9-8A0C-7AF897C1BA2A}"/>
               </a:ext>
             </a:extLst>
           </p:cNvPr>
@@ -2922,7 +2922,7 @@
           <a:bodyPr/>
           <a:lstStyle/>
           <a:p>
-            <a:fld id="{E360CE76-1914-459D-9C16-99AA7840CFA6}" type="datetimeFigureOut">
+            <a:fld id="{31B974E9-EACD-469D-99F2-D2971850AFD3}" type="datetimeFigureOut">
               <a:rPr kumimoji="1" lang="ja-JP" altLang="en-US" smtClean="0"/>
               <a:t>2026/7/30</a:t>
             </a:fld>
@@ -2935,7 +2935,7 @@
           <p:cNvPr id="6" name="フッター プレースホルダー 5">
             <a:extLst>
               <a:ext uri="{FF2B5EF4-FFF2-40B4-BE49-F238E27FC236}">
-                <a16:creationId xmlns:a16="http://schemas.microsoft.com/office/drawing/2014/main" id="{008A0021-6D13-E841-4C01-6DA5980BCEF2}"/>
+                <a16:creationId xmlns:a16="http://schemas.microsoft.com/office/drawing/2014/main" id="{5F3CF942-1119-2734-5424-65ABC455C3E8}"/>
               </a:ext>
             </a:extLst>
           </p:cNvPr>
@@ -2960,7 +2960,7 @@
           <p:cNvPr id="7" name="スライド番号プレースホルダー 6">
             <a:extLst>
               <a:ext uri="{FF2B5EF4-FFF2-40B4-BE49-F238E27FC236}">
-                <a16:creationId xmlns:a16="http://schemas.microsoft.com/office/drawing/2014/main" id="{D79AF2E4-9340-4C82-2F2A-766C34D03DAF}"/>
+                <a16:creationId xmlns:a16="http://schemas.microsoft.com/office/drawing/2014/main" id="{68EFCAB1-2095-EACD-DC7C-5DE8BCBFEF14}"/>
               </a:ext>
             </a:extLst>
           </p:cNvPr>
@@ -2976,7 +2976,7 @@
           <a:bodyPr/>
           <a:lstStyle/>
           <a:p>
-            <a:fld id="{2AE10F04-7F6D-4548-A0C9-EC7E7B19ACDA}" type="slidenum">
+            <a:fld id="{E97320B4-A53F-491A-8314-86FF3D167379}" type="slidenum">
               <a:rPr kumimoji="1" lang="ja-JP" altLang="en-US" smtClean="0"/>
               <a:t>‹#›</a:t>
             </a:fld>
@@ -2987,7 +2987,7 @@
     </p:spTree>
     <p:extLst>
       <p:ext uri="{BB962C8B-B14F-4D97-AF65-F5344CB8AC3E}">
-        <p14:creationId xmlns:p14="http://schemas.microsoft.com/office/powerpoint/2010/main" val="287290375"/>
+        <p14:creationId xmlns:p14="http://schemas.microsoft.com/office/powerpoint/2010/main" val="2813598374"/>
       </p:ext>
     </p:extLst>
   </p:cSld>
@@ -3024,7 +3024,7 @@
           <p:cNvPr id="2" name="タイトル プレースホルダー 1">
             <a:extLst>
               <a:ext uri="{FF2B5EF4-FFF2-40B4-BE49-F238E27FC236}">
-                <a16:creationId xmlns:a16="http://schemas.microsoft.com/office/drawing/2014/main" id="{251E16A4-45BB-5635-1CF8-2DC0D6329815}"/>
+                <a16:creationId xmlns:a16="http://schemas.microsoft.com/office/drawing/2014/main" id="{16282454-3C39-CEA0-35E3-2626D2EB19D9}"/>
               </a:ext>
             </a:extLst>
           </p:cNvPr>
@@ -3062,7 +3062,7 @@
           <p:cNvPr id="3" name="テキスト プレースホルダー 2">
             <a:extLst>
               <a:ext uri="{FF2B5EF4-FFF2-40B4-BE49-F238E27FC236}">
-                <a16:creationId xmlns:a16="http://schemas.microsoft.com/office/drawing/2014/main" id="{DA150812-E4D6-A809-A8DF-E6DFE74E27FA}"/>
+                <a16:creationId xmlns:a16="http://schemas.microsoft.com/office/drawing/2014/main" id="{BCFD76F3-4C6C-AAEC-CF42-7E9BA2579905}"/>
               </a:ext>
             </a:extLst>
           </p:cNvPr>
@@ -3161,7 +3161,7 @@
           <p:cNvPr id="4" name="日付プレースホルダー 3">
             <a:extLst>
               <a:ext uri="{FF2B5EF4-FFF2-40B4-BE49-F238E27FC236}">
-                <a16:creationId xmlns:a16="http://schemas.microsoft.com/office/drawing/2014/main" id="{1EE4411C-6CF4-14CA-C47A-E9E5D1B4F18B}"/>
+                <a16:creationId xmlns:a16="http://schemas.microsoft.com/office/drawing/2014/main" id="{9E8DBE3C-B31D-C078-E2B7-D9DE713BE1D0}"/>
               </a:ext>
             </a:extLst>
           </p:cNvPr>
@@ -3195,7 +3195,7 @@
             </a:lvl1pPr>
           </a:lstStyle>
           <a:p>
-            <a:fld id="{E360CE76-1914-459D-9C16-99AA7840CFA6}" type="datetimeFigureOut">
+            <a:fld id="{31B974E9-EACD-469D-99F2-D2971850AFD3}" type="datetimeFigureOut">
               <a:rPr kumimoji="1" lang="ja-JP" altLang="en-US" smtClean="0"/>
               <a:t>2026/7/30</a:t>
             </a:fld>
@@ -3208,7 +3208,7 @@
           <p:cNvPr id="5" name="フッター プレースホルダー 4">
             <a:extLst>
               <a:ext uri="{FF2B5EF4-FFF2-40B4-BE49-F238E27FC236}">
-                <a16:creationId xmlns:a16="http://schemas.microsoft.com/office/drawing/2014/main" id="{A41D7E49-BB65-B799-09DC-0952A1E71C00}"/>
+                <a16:creationId xmlns:a16="http://schemas.microsoft.com/office/drawing/2014/main" id="{D88BBB2D-2465-AA1B-92EE-AFDA84B21E7F}"/>
               </a:ext>
             </a:extLst>
           </p:cNvPr>
@@ -3251,7 +3251,7 @@
           <p:cNvPr id="6" name="スライド番号プレースホルダー 5">
             <a:extLst>
               <a:ext uri="{FF2B5EF4-FFF2-40B4-BE49-F238E27FC236}">
-                <a16:creationId xmlns:a16="http://schemas.microsoft.com/office/drawing/2014/main" id="{46FF3DF5-8E1E-2F41-1F2C-2F060ECB606C}"/>
+                <a16:creationId xmlns:a16="http://schemas.microsoft.com/office/drawing/2014/main" id="{69F985C9-09E6-92A7-D0B1-FFF6E79DBE3A}"/>
               </a:ext>
             </a:extLst>
           </p:cNvPr>
@@ -3285,7 +3285,7 @@
             </a:lvl1pPr>
           </a:lstStyle>
           <a:p>
-            <a:fld id="{2AE10F04-7F6D-4548-A0C9-EC7E7B19ACDA}" type="slidenum">
+            <a:fld id="{E97320B4-A53F-491A-8314-86FF3D167379}" type="slidenum">
               <a:rPr kumimoji="1" lang="ja-JP" altLang="en-US" smtClean="0"/>
               <a:t>‹#›</a:t>
             </a:fld>
@@ -3296,7 +3296,7 @@
     </p:spTree>
     <p:extLst>
       <p:ext uri="{BB962C8B-B14F-4D97-AF65-F5344CB8AC3E}">
-        <p14:creationId xmlns:p14="http://schemas.microsoft.com/office/powerpoint/2010/main" val="647611595"/>
+        <p14:creationId xmlns:p14="http://schemas.microsoft.com/office/powerpoint/2010/main" val="2185931744"/>
       </p:ext>
     </p:extLst>
   </p:cSld>
@@ -3619,7 +3619,7 @@
           <p:cNvPr id="2" name="テキスト ボックス 1">
             <a:extLst>
               <a:ext uri="{FF2B5EF4-FFF2-40B4-BE49-F238E27FC236}">
-                <a16:creationId xmlns:a16="http://schemas.microsoft.com/office/drawing/2014/main" id="{C2F83CDC-A943-7B59-0A58-7768CAB4DC90}"/>
+                <a16:creationId xmlns:a16="http://schemas.microsoft.com/office/drawing/2014/main" id="{08996414-51E1-9084-CF16-54F88934B78E}"/>
               </a:ext>
             </a:extLst>
           </p:cNvPr>
@@ -3665,7 +3665,7 @@
           <p:cNvPr id="3" name="テキスト ボックス 2">
             <a:extLst>
               <a:ext uri="{FF2B5EF4-FFF2-40B4-BE49-F238E27FC236}">
-                <a16:creationId xmlns:a16="http://schemas.microsoft.com/office/drawing/2014/main" id="{CFBED7A8-F89A-1D91-25C1-4489D0C34E5F}"/>
+                <a16:creationId xmlns:a16="http://schemas.microsoft.com/office/drawing/2014/main" id="{2EA6EAA0-A515-AE73-D3AB-E00C7CBA0A51}"/>
               </a:ext>
             </a:extLst>
           </p:cNvPr>
@@ -3714,7 +3714,7 @@
           <p:cNvPr id="4" name="テキスト ボックス 3">
             <a:extLst>
               <a:ext uri="{FF2B5EF4-FFF2-40B4-BE49-F238E27FC236}">
-                <a16:creationId xmlns:a16="http://schemas.microsoft.com/office/drawing/2014/main" id="{9238072F-95DD-5CEB-421B-186A85082C18}"/>
+                <a16:creationId xmlns:a16="http://schemas.microsoft.com/office/drawing/2014/main" id="{6DE0F90E-8B10-FC6A-373E-08E3ECB5F847}"/>
               </a:ext>
             </a:extLst>
           </p:cNvPr>
@@ -3754,7 +3754,7 @@
           <p:cNvPr id="5" name="テキスト ボックス 4">
             <a:extLst>
               <a:ext uri="{FF2B5EF4-FFF2-40B4-BE49-F238E27FC236}">
-                <a16:creationId xmlns:a16="http://schemas.microsoft.com/office/drawing/2014/main" id="{A1BA0B65-4CB9-084C-6493-6BAED5FA6542}"/>
+                <a16:creationId xmlns:a16="http://schemas.microsoft.com/office/drawing/2014/main" id="{9626CDB8-1A1E-6C91-A1AF-6619CADC7831}"/>
               </a:ext>
             </a:extLst>
           </p:cNvPr>
@@ -3801,7 +3801,7 @@
             <a:hlinkClick r:id="" action="ppaction://media"/>
             <a:extLst>
               <a:ext uri="{FF2B5EF4-FFF2-40B4-BE49-F238E27FC236}">
-                <a16:creationId xmlns:a16="http://schemas.microsoft.com/office/drawing/2014/main" id="{844EDD21-BA10-C708-D8E4-91D94E459CA2}"/>
+                <a16:creationId xmlns:a16="http://schemas.microsoft.com/office/drawing/2014/main" id="{E3BE47ED-0605-85A9-8B2D-8A1DADF70BB7}"/>
               </a:ext>
             </a:extLst>
           </p:cNvPr>
@@ -3836,7 +3836,7 @@
     </p:spTree>
     <p:extLst>
       <p:ext uri="{BB962C8B-B14F-4D97-AF65-F5344CB8AC3E}">
-        <p14:creationId xmlns:p14="http://schemas.microsoft.com/office/powerpoint/2010/main" val="1024992158"/>
+        <p14:creationId xmlns:p14="http://schemas.microsoft.com/office/powerpoint/2010/main" val="1617892768"/>
       </p:ext>
     </p:extLst>
   </p:cSld>
@@ -3960,7 +3960,7 @@
           <p:cNvPr id="2" name="テキスト ボックス 1">
             <a:extLst>
               <a:ext uri="{FF2B5EF4-FFF2-40B4-BE49-F238E27FC236}">
-                <a16:creationId xmlns:a16="http://schemas.microsoft.com/office/drawing/2014/main" id="{DA2EFA5E-87BE-FA91-AB18-C8F32A1BE2AA}"/>
+                <a16:creationId xmlns:a16="http://schemas.microsoft.com/office/drawing/2014/main" id="{EE31249B-FA31-A161-F2EE-CA3CFACAD24E}"/>
               </a:ext>
             </a:extLst>
           </p:cNvPr>
@@ -4006,7 +4006,7 @@
           <p:cNvPr id="3" name="テキスト ボックス 2">
             <a:extLst>
               <a:ext uri="{FF2B5EF4-FFF2-40B4-BE49-F238E27FC236}">
-                <a16:creationId xmlns:a16="http://schemas.microsoft.com/office/drawing/2014/main" id="{846C7D25-2FAD-C281-3AB2-5933A644C38D}"/>
+                <a16:creationId xmlns:a16="http://schemas.microsoft.com/office/drawing/2014/main" id="{19435D26-7862-0427-CD5E-1D487098D598}"/>
               </a:ext>
             </a:extLst>
           </p:cNvPr>
@@ -4046,7 +4046,7 @@
           <p:cNvPr id="4" name="テキスト ボックス 3">
             <a:extLst>
               <a:ext uri="{FF2B5EF4-FFF2-40B4-BE49-F238E27FC236}">
-                <a16:creationId xmlns:a16="http://schemas.microsoft.com/office/drawing/2014/main" id="{2ED36E37-084A-C288-55F9-F358D79B8E1D}"/>
+                <a16:creationId xmlns:a16="http://schemas.microsoft.com/office/drawing/2014/main" id="{677074F3-34E4-AA6D-BE6C-262C22C30167}"/>
               </a:ext>
             </a:extLst>
           </p:cNvPr>
@@ -4110,7 +4110,7 @@
           <p:cNvPr id="5" name="テキスト ボックス 4">
             <a:extLst>
               <a:ext uri="{FF2B5EF4-FFF2-40B4-BE49-F238E27FC236}">
-                <a16:creationId xmlns:a16="http://schemas.microsoft.com/office/drawing/2014/main" id="{BE94A280-9848-6723-2117-B5612A796636}"/>
+                <a16:creationId xmlns:a16="http://schemas.microsoft.com/office/drawing/2014/main" id="{A700BE11-9EDC-7003-1519-3ADB74F8A56E}"/>
               </a:ext>
             </a:extLst>
           </p:cNvPr>
@@ -4157,7 +4157,7 @@
             <a:hlinkClick r:id="" action="ppaction://media"/>
             <a:extLst>
               <a:ext uri="{FF2B5EF4-FFF2-40B4-BE49-F238E27FC236}">
-                <a16:creationId xmlns:a16="http://schemas.microsoft.com/office/drawing/2014/main" id="{C7130962-DE26-057F-F2D1-EDE11F465C7A}"/>
+                <a16:creationId xmlns:a16="http://schemas.microsoft.com/office/drawing/2014/main" id="{BD99A452-7FBE-9A0B-ADCF-302640382C57}"/>
               </a:ext>
             </a:extLst>
           </p:cNvPr>
@@ -4192,7 +4192,7 @@
     </p:spTree>
     <p:extLst>
       <p:ext uri="{BB962C8B-B14F-4D97-AF65-F5344CB8AC3E}">
-        <p14:creationId xmlns:p14="http://schemas.microsoft.com/office/powerpoint/2010/main" val="4151597594"/>
+        <p14:creationId xmlns:p14="http://schemas.microsoft.com/office/powerpoint/2010/main" val="2315275949"/>
       </p:ext>
     </p:extLst>
   </p:cSld>
@@ -4316,7 +4316,7 @@
           <p:cNvPr id="2" name="テキスト ボックス 1">
             <a:extLst>
               <a:ext uri="{FF2B5EF4-FFF2-40B4-BE49-F238E27FC236}">
-                <a16:creationId xmlns:a16="http://schemas.microsoft.com/office/drawing/2014/main" id="{996122AF-BC68-B8F4-5117-753215BAC721}"/>
+                <a16:creationId xmlns:a16="http://schemas.microsoft.com/office/drawing/2014/main" id="{9C9B7919-3285-3649-678A-5631F5FD1A9F}"/>
               </a:ext>
             </a:extLst>
           </p:cNvPr>
@@ -4362,7 +4362,7 @@
           <p:cNvPr id="3" name="テキスト ボックス 2">
             <a:extLst>
               <a:ext uri="{FF2B5EF4-FFF2-40B4-BE49-F238E27FC236}">
-                <a16:creationId xmlns:a16="http://schemas.microsoft.com/office/drawing/2014/main" id="{1CF5CABF-B971-379C-9834-512130CF42E2}"/>
+                <a16:creationId xmlns:a16="http://schemas.microsoft.com/office/drawing/2014/main" id="{DC19BCDE-45CC-4511-F386-740E56446F4F}"/>
               </a:ext>
             </a:extLst>
           </p:cNvPr>
@@ -4402,7 +4402,7 @@
           <p:cNvPr id="4" name="テキスト ボックス 3">
             <a:extLst>
               <a:ext uri="{FF2B5EF4-FFF2-40B4-BE49-F238E27FC236}">
-                <a16:creationId xmlns:a16="http://schemas.microsoft.com/office/drawing/2014/main" id="{7DEAD77E-EF83-29A2-565D-A774630A2F9D}"/>
+                <a16:creationId xmlns:a16="http://schemas.microsoft.com/office/drawing/2014/main" id="{1C572211-957C-34EE-7EBD-AB31D29476B0}"/>
               </a:ext>
             </a:extLst>
           </p:cNvPr>
@@ -4497,7 +4497,7 @@
           <p:cNvPr id="5" name="テキスト ボックス 4">
             <a:extLst>
               <a:ext uri="{FF2B5EF4-FFF2-40B4-BE49-F238E27FC236}">
-                <a16:creationId xmlns:a16="http://schemas.microsoft.com/office/drawing/2014/main" id="{B36CB6D7-12DB-DE19-669E-83AE266CC815}"/>
+                <a16:creationId xmlns:a16="http://schemas.microsoft.com/office/drawing/2014/main" id="{2F032C6B-9C5A-DF2F-A1FD-28B7A8109C3D}"/>
               </a:ext>
             </a:extLst>
           </p:cNvPr>
@@ -4544,7 +4544,7 @@
             <a:hlinkClick r:id="" action="ppaction://media"/>
             <a:extLst>
               <a:ext uri="{FF2B5EF4-FFF2-40B4-BE49-F238E27FC236}">
-                <a16:creationId xmlns:a16="http://schemas.microsoft.com/office/drawing/2014/main" id="{45F389DA-F6DE-B3C8-4C96-892B0DE2A9AA}"/>
+                <a16:creationId xmlns:a16="http://schemas.microsoft.com/office/drawing/2014/main" id="{54375118-0105-8613-CAB2-766A12381C58}"/>
               </a:ext>
             </a:extLst>
           </p:cNvPr>
@@ -4579,7 +4579,7 @@
     </p:spTree>
     <p:extLst>
       <p:ext uri="{BB962C8B-B14F-4D97-AF65-F5344CB8AC3E}">
-        <p14:creationId xmlns:p14="http://schemas.microsoft.com/office/powerpoint/2010/main" val="1285583648"/>
+        <p14:creationId xmlns:p14="http://schemas.microsoft.com/office/powerpoint/2010/main" val="2135852251"/>
       </p:ext>
     </p:extLst>
   </p:cSld>
@@ -4703,7 +4703,7 @@
           <p:cNvPr id="2" name="テキスト ボックス 1">
             <a:extLst>
               <a:ext uri="{FF2B5EF4-FFF2-40B4-BE49-F238E27FC236}">
-                <a16:creationId xmlns:a16="http://schemas.microsoft.com/office/drawing/2014/main" id="{F594D5BE-D874-EE86-2A5C-FEFBE6290E73}"/>
+                <a16:creationId xmlns:a16="http://schemas.microsoft.com/office/drawing/2014/main" id="{D0D75559-FCA0-EBE2-CEC6-649EB4D841A3}"/>
               </a:ext>
             </a:extLst>
           </p:cNvPr>
@@ -4749,7 +4749,7 @@
           <p:cNvPr id="3" name="テキスト ボックス 2">
             <a:extLst>
               <a:ext uri="{FF2B5EF4-FFF2-40B4-BE49-F238E27FC236}">
-                <a16:creationId xmlns:a16="http://schemas.microsoft.com/office/drawing/2014/main" id="{887C03FB-F36C-0B68-8DAC-D423227BFF40}"/>
+                <a16:creationId xmlns:a16="http://schemas.microsoft.com/office/drawing/2014/main" id="{8CFDE929-EE68-9C9C-7F80-4318D96AF2F6}"/>
               </a:ext>
             </a:extLst>
           </p:cNvPr>
@@ -4789,7 +4789,7 @@
           <p:cNvPr id="4" name="テキスト ボックス 3">
             <a:extLst>
               <a:ext uri="{FF2B5EF4-FFF2-40B4-BE49-F238E27FC236}">
-                <a16:creationId xmlns:a16="http://schemas.microsoft.com/office/drawing/2014/main" id="{D1DC3240-C450-EFEA-BDD7-95CEA050D532}"/>
+                <a16:creationId xmlns:a16="http://schemas.microsoft.com/office/drawing/2014/main" id="{D554F596-F476-C785-FECC-BA26BA9EF16E}"/>
               </a:ext>
             </a:extLst>
           </p:cNvPr>
@@ -4899,7 +4899,7 @@
           <p:cNvPr id="5" name="テキスト ボックス 4">
             <a:extLst>
               <a:ext uri="{FF2B5EF4-FFF2-40B4-BE49-F238E27FC236}">
-                <a16:creationId xmlns:a16="http://schemas.microsoft.com/office/drawing/2014/main" id="{24E9AB42-FE85-FC0D-DC0D-082B5BF7AF0B}"/>
+                <a16:creationId xmlns:a16="http://schemas.microsoft.com/office/drawing/2014/main" id="{73C8EC95-402D-FD0C-BC6F-A2E9BBB64C27}"/>
               </a:ext>
             </a:extLst>
           </p:cNvPr>
@@ -4946,7 +4946,7 @@
             <a:hlinkClick r:id="" action="ppaction://media"/>
             <a:extLst>
               <a:ext uri="{FF2B5EF4-FFF2-40B4-BE49-F238E27FC236}">
-                <a16:creationId xmlns:a16="http://schemas.microsoft.com/office/drawing/2014/main" id="{1EF865EE-51DE-A81E-0CAB-3BED3A5E9F4B}"/>
+                <a16:creationId xmlns:a16="http://schemas.microsoft.com/office/drawing/2014/main" id="{79ECCD46-D210-F12C-DC81-3050C4AF1690}"/>
               </a:ext>
             </a:extLst>
           </p:cNvPr>
@@ -4981,7 +4981,7 @@
     </p:spTree>
     <p:extLst>
       <p:ext uri="{BB962C8B-B14F-4D97-AF65-F5344CB8AC3E}">
-        <p14:creationId xmlns:p14="http://schemas.microsoft.com/office/powerpoint/2010/main" val="3490143968"/>
+        <p14:creationId xmlns:p14="http://schemas.microsoft.com/office/powerpoint/2010/main" val="3088255886"/>
       </p:ext>
     </p:extLst>
   </p:cSld>
@@ -5105,7 +5105,7 @@
           <p:cNvPr id="2" name="テキスト ボックス 1">
             <a:extLst>
               <a:ext uri="{FF2B5EF4-FFF2-40B4-BE49-F238E27FC236}">
-                <a16:creationId xmlns:a16="http://schemas.microsoft.com/office/drawing/2014/main" id="{5720EE81-8B1F-CC72-62DB-2093F2D33A82}"/>
+                <a16:creationId xmlns:a16="http://schemas.microsoft.com/office/drawing/2014/main" id="{80212470-0EA3-C112-BF22-E6FE0476AD88}"/>
               </a:ext>
             </a:extLst>
           </p:cNvPr>
@@ -5151,7 +5151,7 @@
           <p:cNvPr id="3" name="テキスト ボックス 2">
             <a:extLst>
               <a:ext uri="{FF2B5EF4-FFF2-40B4-BE49-F238E27FC236}">
-                <a16:creationId xmlns:a16="http://schemas.microsoft.com/office/drawing/2014/main" id="{AC12F9F4-6DDD-7B98-ADF0-9984EB3B229C}"/>
+                <a16:creationId xmlns:a16="http://schemas.microsoft.com/office/drawing/2014/main" id="{3687A96C-F1D6-A15B-09D0-065A26F1E5DB}"/>
               </a:ext>
             </a:extLst>
           </p:cNvPr>
@@ -5191,7 +5191,7 @@
           <p:cNvPr id="4" name="テキスト ボックス 3">
             <a:extLst>
               <a:ext uri="{FF2B5EF4-FFF2-40B4-BE49-F238E27FC236}">
-                <a16:creationId xmlns:a16="http://schemas.microsoft.com/office/drawing/2014/main" id="{7AF20A05-8C6F-7AF0-460E-98085EA35D48}"/>
+                <a16:creationId xmlns:a16="http://schemas.microsoft.com/office/drawing/2014/main" id="{0783AEFE-0D5C-3124-78D0-CF4FD3D610D5}"/>
               </a:ext>
             </a:extLst>
           </p:cNvPr>
@@ -5215,20 +5215,14 @@
           <a:lstStyle/>
           <a:p>
             <a:r>
-              <a:rPr kumimoji="1" lang="en-US" altLang="ja-JP" sz="2000">
+              <a:rPr kumimoji="1" lang="ja-JP" altLang="en-US" sz="2000">
                 <a:solidFill>
                   <a:srgbClr val="333333"/>
                 </a:solidFill>
                 <a:latin typeface="Arial" panose="020B0604020202020204" pitchFamily="34" charset="0"/>
               </a:rPr>
-              <a:t>Set confirmed custom domain</a:t>
-            </a:r>
-            <a:endParaRPr kumimoji="1" lang="ja-JP" altLang="en-US" sz="2000">
-              <a:solidFill>
-                <a:srgbClr val="333333"/>
-              </a:solidFill>
-              <a:latin typeface="Arial" panose="020B0604020202020204" pitchFamily="34" charset="0"/>
-            </a:endParaRPr>
+              <a:t>直近のコミットでは、実装の見直しと継続的な改善が行われました。</a:t>
+            </a:r>
           </a:p>
         </p:txBody>
       </p:sp>
@@ -5237,7 +5231,7 @@
           <p:cNvPr id="5" name="テキスト ボックス 4">
             <a:extLst>
               <a:ext uri="{FF2B5EF4-FFF2-40B4-BE49-F238E27FC236}">
-                <a16:creationId xmlns:a16="http://schemas.microsoft.com/office/drawing/2014/main" id="{BB1E029E-1A32-3C95-AB9A-A0DC73EF151F}"/>
+                <a16:creationId xmlns:a16="http://schemas.microsoft.com/office/drawing/2014/main" id="{2E4D54FE-AD6D-C69F-7757-7704F9B21DA8}"/>
               </a:ext>
             </a:extLst>
           </p:cNvPr>
@@ -5284,7 +5278,7 @@
             <a:hlinkClick r:id="" action="ppaction://media"/>
             <a:extLst>
               <a:ext uri="{FF2B5EF4-FFF2-40B4-BE49-F238E27FC236}">
-                <a16:creationId xmlns:a16="http://schemas.microsoft.com/office/drawing/2014/main" id="{B7DCDEF6-757E-0BE8-FCCD-11FF79637431}"/>
+                <a16:creationId xmlns:a16="http://schemas.microsoft.com/office/drawing/2014/main" id="{8F41EE30-F173-D326-6CDA-0E972A73B088}"/>
               </a:ext>
             </a:extLst>
           </p:cNvPr>
@@ -5319,7 +5313,7 @@
     </p:spTree>
     <p:extLst>
       <p:ext uri="{BB962C8B-B14F-4D97-AF65-F5344CB8AC3E}">
-        <p14:creationId xmlns:p14="http://schemas.microsoft.com/office/powerpoint/2010/main" val="693226164"/>
+        <p14:creationId xmlns:p14="http://schemas.microsoft.com/office/powerpoint/2010/main" val="3931804860"/>
       </p:ext>
     </p:extLst>
   </p:cSld>
@@ -5362,7 +5356,7 @@
                                   <p:childTnLst>
                                     <p:cmd type="call" cmd="playFrom(0.0)">
                                       <p:cBhvr>
-                                        <p:cTn id="6" dur="6451" fill="hold"/>
+                                        <p:cTn id="6" dur="6076" fill="hold"/>
                                         <p:tgtEl>
                                           <p:spTgt spid="6"/>
                                         </p:tgtEl>
@@ -5443,7 +5437,7 @@
           <p:cNvPr id="2" name="テキスト ボックス 1">
             <a:extLst>
               <a:ext uri="{FF2B5EF4-FFF2-40B4-BE49-F238E27FC236}">
-                <a16:creationId xmlns:a16="http://schemas.microsoft.com/office/drawing/2014/main" id="{4B9AE1AE-6605-1FEE-8DBE-5D6E9C0CD939}"/>
+                <a16:creationId xmlns:a16="http://schemas.microsoft.com/office/drawing/2014/main" id="{706D534F-57A5-1B75-F970-070671525D90}"/>
               </a:ext>
             </a:extLst>
           </p:cNvPr>
@@ -5489,7 +5483,7 @@
           <p:cNvPr id="3" name="テキスト ボックス 2">
             <a:extLst>
               <a:ext uri="{FF2B5EF4-FFF2-40B4-BE49-F238E27FC236}">
-                <a16:creationId xmlns:a16="http://schemas.microsoft.com/office/drawing/2014/main" id="{B0A47BE3-B379-EFC1-268D-F2E91699BCFD}"/>
+                <a16:creationId xmlns:a16="http://schemas.microsoft.com/office/drawing/2014/main" id="{DFC14208-F39B-7FF7-B195-85B502570C64}"/>
               </a:ext>
             </a:extLst>
           </p:cNvPr>
@@ -5529,7 +5523,7 @@
           <p:cNvPr id="4" name="テキスト ボックス 3">
             <a:extLst>
               <a:ext uri="{FF2B5EF4-FFF2-40B4-BE49-F238E27FC236}">
-                <a16:creationId xmlns:a16="http://schemas.microsoft.com/office/drawing/2014/main" id="{FCCFD384-2278-AE55-4961-EACB1F20ACFE}"/>
+                <a16:creationId xmlns:a16="http://schemas.microsoft.com/office/drawing/2014/main" id="{AA6F7A67-4007-855C-32B7-3B9E18A9FD80}"/>
               </a:ext>
             </a:extLst>
           </p:cNvPr>
@@ -5594,7 +5588,7 @@
           <p:cNvPr id="5" name="テキスト ボックス 4">
             <a:extLst>
               <a:ext uri="{FF2B5EF4-FFF2-40B4-BE49-F238E27FC236}">
-                <a16:creationId xmlns:a16="http://schemas.microsoft.com/office/drawing/2014/main" id="{F4E5A2AF-52A1-877B-2301-34CAC1D41641}"/>
+                <a16:creationId xmlns:a16="http://schemas.microsoft.com/office/drawing/2014/main" id="{FA3C82A7-A110-5BC1-8CAB-9BCBD4C73C0F}"/>
               </a:ext>
             </a:extLst>
           </p:cNvPr>
@@ -5641,7 +5635,7 @@
             <a:hlinkClick r:id="" action="ppaction://media"/>
             <a:extLst>
               <a:ext uri="{FF2B5EF4-FFF2-40B4-BE49-F238E27FC236}">
-                <a16:creationId xmlns:a16="http://schemas.microsoft.com/office/drawing/2014/main" id="{35240B4F-288E-BEEB-686A-CEED7B966ABD}"/>
+                <a16:creationId xmlns:a16="http://schemas.microsoft.com/office/drawing/2014/main" id="{F957C99C-BE9E-BBBC-D365-E02C7AC3B985}"/>
               </a:ext>
             </a:extLst>
           </p:cNvPr>
@@ -5676,7 +5670,7 @@
     </p:spTree>
     <p:extLst>
       <p:ext uri="{BB962C8B-B14F-4D97-AF65-F5344CB8AC3E}">
-        <p14:creationId xmlns:p14="http://schemas.microsoft.com/office/powerpoint/2010/main" val="838119633"/>
+        <p14:creationId xmlns:p14="http://schemas.microsoft.com/office/powerpoint/2010/main" val="239268558"/>
       </p:ext>
     </p:extLst>
   </p:cSld>
